--- a/media/resources/files/EkiOrunduuOnduktar_Koboytuu_1234_WVlce56.pptx
+++ b/media/resources/files/EkiOrunduuOnduktar_Koboytuu_1234_WVlce56.pptx
@@ -4211,7 +4211,7 @@
                 <a:ea typeface="+mn-ea"/>
                 <a:cs typeface="+mn-cs"/>
               </a:rPr>
-              <a:t>Турдуу пикирлер учун ыраазычылык билдиребиз.</a:t>
+              <a:t>Түрдүү пикирлер үчүн ыраазычылык билдиребиз.</a:t>
             </a:r>
           </a:p>
           <a:p>

--- a/media/resources/files/EkiOrunduuOnduktar_Koboytuu_1234_WVlce56.pptx
+++ b/media/resources/files/EkiOrunduuOnduktar_Koboytuu_1234_WVlce56.pptx
@@ -2388,7 +2388,7 @@
             <a:pPr algn="ctr"/>
             <a:r>
               <a:rPr lang="en-GB" sz="2000" dirty="0"/>
-              <a:t>6.4 × 0.1</a:t>
+              <a:t>6,4 × 0,1</a:t>
             </a:r>
           </a:p>
         </p:txBody>
@@ -2619,7 +2619,7 @@
             <a:pPr algn="ctr"/>
             <a:r>
               <a:rPr lang="en-GB" sz="2000" dirty="0"/>
-              <a:t>4.4 × 1.2</a:t>
+              <a:t>4,4 × 1,2</a:t>
             </a:r>
           </a:p>
         </p:txBody>
@@ -2694,7 +2694,7 @@
             <a:pPr algn="ctr"/>
             <a:r>
               <a:rPr lang="en-GB" sz="2000" dirty="0"/>
-              <a:t>0.65 × 0.13</a:t>
+              <a:t>0,65 × 0,13</a:t>
             </a:r>
           </a:p>
         </p:txBody>
@@ -2769,7 +2769,7 @@
             <a:pPr algn="ctr"/>
             <a:r>
               <a:rPr lang="en-GB" sz="2000" dirty="0"/>
-              <a:t>2.17 × 0.53</a:t>
+              <a:t>2,17 × 0,53</a:t>
             </a:r>
           </a:p>
         </p:txBody>
@@ -2968,7 +2968,7 @@
             <a:pPr algn="ctr"/>
             <a:r>
               <a:rPr lang="en-GB" sz="2000" dirty="0"/>
-              <a:t>6.4 × 0.1</a:t>
+              <a:t>6,4 × 0,1</a:t>
             </a:r>
           </a:p>
         </p:txBody>
@@ -3208,7 +3208,7 @@
             <a:pPr algn="just"/>
             <a:r>
               <a:rPr lang="en-GB" sz="2000" dirty="0"/>
-              <a:t>0.64</a:t>
+              <a:t>0,64</a:t>
             </a:r>
           </a:p>
         </p:txBody>
@@ -3244,7 +3244,7 @@
             <a:pPr algn="ctr"/>
             <a:r>
               <a:rPr lang="en-GB" sz="2000" dirty="0"/>
-              <a:t>4.4 × 1.2</a:t>
+              <a:t>4,4 × 1,2</a:t>
             </a:r>
           </a:p>
         </p:txBody>
@@ -3328,7 +3328,7 @@
             <a:pPr algn="just"/>
             <a:r>
               <a:rPr lang="en-GB" sz="2000" dirty="0"/>
-              <a:t>5.28</a:t>
+              <a:t>5,28</a:t>
             </a:r>
           </a:p>
         </p:txBody>
@@ -3364,7 +3364,7 @@
             <a:pPr algn="ctr"/>
             <a:r>
               <a:rPr lang="en-GB" sz="2000" dirty="0"/>
-              <a:t>0.65 × 0.13</a:t>
+              <a:t>0,65 × 0,13</a:t>
             </a:r>
           </a:p>
         </p:txBody>
@@ -3448,7 +3448,7 @@
             <a:pPr algn="just"/>
             <a:r>
               <a:rPr lang="en-GB" sz="2000" dirty="0"/>
-              <a:t>0.0845</a:t>
+              <a:t>0,0845</a:t>
             </a:r>
           </a:p>
         </p:txBody>
@@ -3484,7 +3484,7 @@
             <a:pPr algn="ctr"/>
             <a:r>
               <a:rPr lang="en-GB" sz="2000" dirty="0"/>
-              <a:t>2.17 × 0.53</a:t>
+              <a:t>2,17 × 0,53</a:t>
             </a:r>
           </a:p>
         </p:txBody>
@@ -3568,7 +3568,7 @@
             <a:pPr algn="just"/>
             <a:r>
               <a:rPr lang="en-GB" sz="2000"/>
-              <a:t>1.1501</a:t>
+              <a:t>1,1501</a:t>
             </a:r>
             <a:endParaRPr lang="en-GB" sz="2000" dirty="0"/>
           </a:p>
